--- a/AI_Usecases/AI-8-TraditionalAlgorithm_vs_AI_Algorithm.pptx
+++ b/AI_Usecases/AI-8-TraditionalAlgorithm_vs_AI_Algorithm.pptx
@@ -237,7 +237,7 @@
           <a:p>
             <a:fld id="{7BAEECA8-D063-486F-AE31-5020270C1449}" type="datetimeFigureOut">
               <a:rPr lang="en-US" smtClean="0"/>
-              <a:t>6/23/2026</a:t>
+              <a:t>8/2/2026</a:t>
             </a:fld>
             <a:endParaRPr lang="en-US"/>
           </a:p>
@@ -414,7 +414,7 @@
           <a:p>
             <a:fld id="{CB233BD1-3BA8-448D-9D08-7846095EA517}" type="datetimeFigureOut">
               <a:rPr lang="en-US" smtClean="0"/>
-              <a:t>6/23/2026</a:t>
+              <a:t>8/2/2026</a:t>
             </a:fld>
             <a:endParaRPr lang="en-US"/>
           </a:p>
@@ -828,7 +828,7 @@
           <a:p>
             <a:fld id="{6383FAE1-13DE-4511-8C1B-C8AFB720664C}" type="datetimeFigureOut">
               <a:rPr lang="en-US" smtClean="0"/>
-              <a:t>6/23/2026</a:t>
+              <a:t>8/2/2026</a:t>
             </a:fld>
             <a:endParaRPr lang="en-US"/>
           </a:p>
@@ -1026,7 +1026,7 @@
           <a:p>
             <a:fld id="{6383FAE1-13DE-4511-8C1B-C8AFB720664C}" type="datetimeFigureOut">
               <a:rPr lang="en-US" smtClean="0"/>
-              <a:t>6/23/2026</a:t>
+              <a:t>8/2/2026</a:t>
             </a:fld>
             <a:endParaRPr lang="en-US"/>
           </a:p>
@@ -1234,7 +1234,7 @@
           <a:p>
             <a:fld id="{6383FAE1-13DE-4511-8C1B-C8AFB720664C}" type="datetimeFigureOut">
               <a:rPr lang="en-US" smtClean="0"/>
-              <a:t>6/23/2026</a:t>
+              <a:t>8/2/2026</a:t>
             </a:fld>
             <a:endParaRPr lang="en-US"/>
           </a:p>
@@ -1432,7 +1432,7 @@
           <a:p>
             <a:fld id="{6383FAE1-13DE-4511-8C1B-C8AFB720664C}" type="datetimeFigureOut">
               <a:rPr lang="en-US" smtClean="0"/>
-              <a:t>6/23/2026</a:t>
+              <a:t>8/2/2026</a:t>
             </a:fld>
             <a:endParaRPr lang="en-US"/>
           </a:p>
@@ -1707,7 +1707,7 @@
           <a:p>
             <a:fld id="{6383FAE1-13DE-4511-8C1B-C8AFB720664C}" type="datetimeFigureOut">
               <a:rPr lang="en-US" smtClean="0"/>
-              <a:t>6/23/2026</a:t>
+              <a:t>8/2/2026</a:t>
             </a:fld>
             <a:endParaRPr lang="en-US"/>
           </a:p>
@@ -1972,7 +1972,7 @@
           <a:p>
             <a:fld id="{6383FAE1-13DE-4511-8C1B-C8AFB720664C}" type="datetimeFigureOut">
               <a:rPr lang="en-US" smtClean="0"/>
-              <a:t>6/23/2026</a:t>
+              <a:t>8/2/2026</a:t>
             </a:fld>
             <a:endParaRPr lang="en-US"/>
           </a:p>
@@ -2384,7 +2384,7 @@
           <a:p>
             <a:fld id="{6383FAE1-13DE-4511-8C1B-C8AFB720664C}" type="datetimeFigureOut">
               <a:rPr lang="en-US" smtClean="0"/>
-              <a:t>6/23/2026</a:t>
+              <a:t>8/2/2026</a:t>
             </a:fld>
             <a:endParaRPr lang="en-US"/>
           </a:p>
@@ -2525,7 +2525,7 @@
           <a:p>
             <a:fld id="{6383FAE1-13DE-4511-8C1B-C8AFB720664C}" type="datetimeFigureOut">
               <a:rPr lang="en-US" smtClean="0"/>
-              <a:t>6/23/2026</a:t>
+              <a:t>8/2/2026</a:t>
             </a:fld>
             <a:endParaRPr lang="en-US"/>
           </a:p>
@@ -2638,7 +2638,7 @@
           <a:p>
             <a:fld id="{6383FAE1-13DE-4511-8C1B-C8AFB720664C}" type="datetimeFigureOut">
               <a:rPr lang="en-US" smtClean="0"/>
-              <a:t>6/23/2026</a:t>
+              <a:t>8/2/2026</a:t>
             </a:fld>
             <a:endParaRPr lang="en-US"/>
           </a:p>
@@ -2949,7 +2949,7 @@
           <a:p>
             <a:fld id="{6383FAE1-13DE-4511-8C1B-C8AFB720664C}" type="datetimeFigureOut">
               <a:rPr lang="en-US" smtClean="0"/>
-              <a:t>6/23/2026</a:t>
+              <a:t>8/2/2026</a:t>
             </a:fld>
             <a:endParaRPr lang="en-US"/>
           </a:p>
@@ -3240,7 +3240,7 @@
           <a:p>
             <a:fld id="{6383FAE1-13DE-4511-8C1B-C8AFB720664C}" type="datetimeFigureOut">
               <a:rPr lang="en-US" smtClean="0"/>
-              <a:t>6/23/2026</a:t>
+              <a:t>8/2/2026</a:t>
             </a:fld>
             <a:endParaRPr lang="en-US"/>
           </a:p>
@@ -3484,7 +3484,7 @@
           <a:p>
             <a:fld id="{6383FAE1-13DE-4511-8C1B-C8AFB720664C}" type="datetimeFigureOut">
               <a:rPr lang="en-US" smtClean="0"/>
-              <a:t>6/23/2026</a:t>
+              <a:t>8/2/2026</a:t>
             </a:fld>
             <a:endParaRPr lang="en-US"/>
           </a:p>
@@ -4260,7 +4260,7 @@
         </p:blipFill>
         <p:spPr>
           <a:xfrm>
-            <a:off x="198658" y="82296"/>
+            <a:off x="280954" y="1417320"/>
             <a:ext cx="10745479" cy="4683927"/>
           </a:xfrm>
           <a:prstGeom prst="rect">
@@ -4326,7 +4326,7 @@
         </p:blipFill>
         <p:spPr>
           <a:xfrm>
-            <a:off x="96988" y="64008"/>
+            <a:off x="69556" y="1179576"/>
             <a:ext cx="10568066" cy="4172978"/>
           </a:xfrm>
           <a:prstGeom prst="rect">
@@ -5256,7 +5256,7 @@
         </p:nvSpPr>
         <p:spPr>
           <a:xfrm>
-            <a:off x="292608" y="146423"/>
+            <a:off x="339852" y="1344287"/>
             <a:ext cx="11512296" cy="4524315"/>
           </a:xfrm>
           <a:prstGeom prst="rect">
@@ -5901,7 +5901,7 @@
         </p:nvSpPr>
         <p:spPr>
           <a:xfrm>
-            <a:off x="292608" y="146423"/>
+            <a:off x="475488" y="1316855"/>
             <a:ext cx="10552176" cy="2308324"/>
           </a:xfrm>
           <a:prstGeom prst="rect">
@@ -6045,7 +6045,7 @@
         </p:nvSpPr>
         <p:spPr>
           <a:xfrm>
-            <a:off x="292608" y="146423"/>
+            <a:off x="374904" y="1120676"/>
             <a:ext cx="10552176" cy="2308324"/>
           </a:xfrm>
           <a:prstGeom prst="rect">
@@ -6193,7 +6193,7 @@
         </p:nvSpPr>
         <p:spPr>
           <a:xfrm>
-            <a:off x="292608" y="146423"/>
+            <a:off x="292608" y="1024247"/>
             <a:ext cx="10552176" cy="5262979"/>
           </a:xfrm>
           <a:prstGeom prst="rect">
@@ -6476,8 +6476,8 @@
         </p:nvSpPr>
         <p:spPr>
           <a:xfrm>
-            <a:off x="292608" y="146423"/>
-            <a:ext cx="10552176" cy="3785652"/>
+            <a:off x="310896" y="1042535"/>
+            <a:ext cx="10552176" cy="3416320"/>
           </a:xfrm>
           <a:prstGeom prst="rect">
             <a:avLst/>
@@ -6599,16 +6599,6 @@
               </a:rPr>
               <a:t>Converting spoken language to text may be 90% accurate.</a:t>
             </a:r>
-          </a:p>
-          <a:p>
-            <a:endParaRPr lang="en-US" sz="2400" dirty="0">
-              <a:solidFill>
-                <a:schemeClr val="accent6">
-                  <a:lumMod val="60000"/>
-                  <a:lumOff val="40000"/>
-                </a:schemeClr>
-              </a:solidFill>
-            </a:endParaRPr>
           </a:p>
         </p:txBody>
       </p:sp>
@@ -6742,7 +6732,7 @@
         </p:nvSpPr>
         <p:spPr>
           <a:xfrm>
-            <a:off x="612648" y="174767"/>
+            <a:off x="1819656" y="1353027"/>
             <a:ext cx="9957816" cy="470000"/>
           </a:xfrm>
           <a:prstGeom prst="rect">
@@ -6812,8 +6802,8 @@
         </p:nvSpPr>
         <p:spPr>
           <a:xfrm>
-            <a:off x="132588" y="1450447"/>
-            <a:ext cx="6190488" cy="4537139"/>
+            <a:off x="315468" y="2019756"/>
+            <a:ext cx="6752844" cy="3746795"/>
           </a:xfrm>
           <a:prstGeom prst="rect">
             <a:avLst/>
@@ -7144,7 +7134,7 @@
         </p:nvSpPr>
         <p:spPr>
           <a:xfrm>
-            <a:off x="7694676" y="1450447"/>
+            <a:off x="7802880" y="3306679"/>
             <a:ext cx="4256532" cy="1963294"/>
           </a:xfrm>
           <a:prstGeom prst="rect">
@@ -7366,7 +7356,7 @@
         </p:nvSpPr>
         <p:spPr>
           <a:xfrm>
-            <a:off x="246888" y="437340"/>
+            <a:off x="630936" y="1196292"/>
             <a:ext cx="10195560" cy="5244000"/>
           </a:xfrm>
           <a:prstGeom prst="rect">
@@ -7774,7 +7764,7 @@
         </p:nvSpPr>
         <p:spPr>
           <a:xfrm>
-            <a:off x="246888" y="437340"/>
+            <a:off x="475488" y="1720840"/>
             <a:ext cx="10195560" cy="3416320"/>
           </a:xfrm>
           <a:prstGeom prst="rect">
@@ -8022,7 +8012,7 @@
         </p:nvSpPr>
         <p:spPr>
           <a:xfrm>
-            <a:off x="246888" y="437340"/>
+            <a:off x="740664" y="1461468"/>
             <a:ext cx="10195560" cy="2308324"/>
           </a:xfrm>
           <a:prstGeom prst="rect">
@@ -8179,7 +8169,7 @@
         </p:nvSpPr>
         <p:spPr>
           <a:xfrm>
-            <a:off x="246888" y="437340"/>
+            <a:off x="91440" y="1434036"/>
             <a:ext cx="10195560" cy="2677656"/>
           </a:xfrm>
           <a:prstGeom prst="rect">
@@ -8346,7 +8336,7 @@
         </p:nvSpPr>
         <p:spPr>
           <a:xfrm>
-            <a:off x="246888" y="437340"/>
+            <a:off x="210312" y="2385012"/>
             <a:ext cx="10195560" cy="461665"/>
           </a:xfrm>
           <a:prstGeom prst="rect">
